--- a/dist/weeks-포트폴리오제작/포트폴리오제작_03주차_벤치마킹.pptx
+++ b/dist/weeks-포트폴리오제작/포트폴리오제작_03주차_벤치마킹.pptx
@@ -516,7 +516,13 @@
           <a:p>
             <a:r>
               <a:rPr lang="en-US" dirty="0"/>
-              <a:t>[운영 메모]
+              <a:t>[말할 내용]
+포트폴리오제작 세 번째 시간입니다.
+1주차에 포트폴리오가 어디서 어떻게 읽히는지 봤고, 2주차에 각자 강점과 목표 직무를 정했습니다.
+오늘은 잘된 사례를 뜯어봅니다. 감상하려고 보는 게 아니라, 내 것에 쓸 구조를 가져오려고 봅니다.
+오늘 끝나면 가져올 것 세 가지와 가져오지 않을 것 한 가지를, 근거와 함께 손에 쥐고 가시게 됩니다. 다음 주 스토리라인이 이걸로 시작합니다.
+시작 전에 하나. 1주차 스크랩 과제 세 개, 지금 창 하나에 열어 두세요. 오늘은 그게 재료입니다.
+[운영 메모]
 플립러닝 구조다. 1주차 스크랩 과제를 안 해온 학생은 오늘 조별 분석에 참여할 재료가 없다. 시작 전에 확인하고, 없으면 조원 자료를 함께 보게 배치할 것.</a:t>
             </a:r>
             <a:endParaRPr lang="en-US" dirty="0"/>
@@ -605,7 +611,14 @@
           <a:p>
             <a:r>
               <a:rPr lang="en-US" dirty="0"/>
-              <a:t>[운영 메모]
+              <a:t>[말할 내용]
+이제 나는 무엇이 다른가, 를 사례 분석에서 끌어냅니다. 순서가 있습니다.
+먼저 공통점을 찾습니다. 세 사례가 다 하고 있는 것. 이건 차별화가 아니라 기본값입니다. 다만 빠뜨리면 감점이에요. 그래서 먼저 적습니다.
+다음에 빈 곳을 찾습니다. 셋 다 안 하고 있는 것.
+그런데 여기서 많이들 무리하십니다. 아무도 안 하는 걸 찾았다고 바로 하겠다고 하시는데, 내가 못 하는 걸 고르면 소용없어요.
+그래서 세 번째가 필요합니다. 2주차 워크시트의 강점 세 개와 대조하세요. 겹치는 지점만 진짜 차별화 포인트입니다.
+아래 한 줄이 결론입니다. 차별화는 남들과 다르게가 아니라, 내가 증명할 수 있는 것 중 남들이 덜 하는 것.
+[운영 메모]
 02에서 학생들이 무리한 아이디어를 내는 경우가 많다. 03의 대조 단계를 반드시 거치게 할 것.</a:t>
             </a:r>
             <a:endParaRPr lang="en-US" dirty="0"/>
@@ -694,8 +707,13 @@
           <a:p>
             <a:r>
               <a:rPr lang="en-US" dirty="0"/>
-              <a:t>[운영 메모]
-50분 + 25분. 조는 목표 직무가 비슷한 사람끼리.</a:t>
+              <a:t>[말할 내용]
+여기까지가 강의입니다. 이제 남은 시간은 전부 실습이에요.
+45분 조별 분석, 휴식, 그다음 20분 개인 정리입니다.
+조는 미리 짜 두었습니다. 2주차에 정하신 목표 직무가 비슷한 분들끼리 묶었어요. 그래야 토론이 굴러갑니다.
+소회의실로 나눠 보내겠습니다. 제가 돌아가며 들어갈 테니, 막히면 도움 요청 눌러 주세요.
+[운영 메모]
+45분 + 20분. 조는 목표 직무가 비슷한 사람끼리.</a:t>
             </a:r>
             <a:endParaRPr lang="en-US" dirty="0"/>
           </a:p>
@@ -783,7 +801,15 @@
           <a:p>
             <a:r>
               <a:rPr lang="en-US" dirty="0"/>
-              <a:t>[운영 메모]
+              <a:t>[말할 내용]
+실습 1, 45분입니다. 소회의실에서 진행합니다.
+처음 8분은 공유입니다. 각자 가져온 사례 세 개를 1분씩 소개하세요. 평가는 하지 마시고 왜 골랐는지만 말합니다.
+다음 17분, 분해입니다. 공유 문서에 표를 올려 뒀습니다. 네 구성 요소로 나눠 적으세요. 여기서 중요한 건 숫자입니다. 프로젝트 몇 개, 각각 몇 장, 순서 기준이 뭔지. 깔끔하다 같은 말은 적지 마세요. 다음 주에 못 씁니다.
+다음 15분, 유형 판정입니다. 각 사례가 세 유형 중 어디인지 조원끼리 정하세요.
+여기서 의견이 갈리면 그게 제일 좋은 순간입니다. 서둘러 하나로 합치지 마시고 왜 그렇게 봤는지를 서로 말해 보세요. 섞여 있는 사례도 많습니다.
+마지막 5분, 조에서 나온 발견 세 가지를 적어 주세요. 끝나고 채팅으로 모으겠습니다.
+스크랩 과제를 못 해오신 분은 지금 채팅으로 알려 주세요. 조원 자료를 같이 보시게 배치하겠습니다.
+[운영 메모]
 유형 판정에서 의견이 갈릴 때가 가장 좋은 순간이다. 서둘러 정답을 주지 말고 근거를 말하게 할 것.</a:t>
             </a:r>
             <a:endParaRPr lang="en-US" dirty="0"/>
@@ -872,7 +898,14 @@
           <a:p>
             <a:r>
               <a:rPr lang="en-US" dirty="0"/>
-              <a:t>[운영 메모]
+              <a:t>[말할 내용]
+실습 2, 20분입니다. 이번엔 개인 작업이에요. 소회의실 닫고 각자 하십니다.
+앞 6분. 세 사례의 공통점, 그리고 아무도 안 하는 것을 각각 적으세요.
+다음 5분. 2주차 워크시트를 꺼내서 강점 세 개와 대조합니다. 안 가져오신 분은 지금 찾으세요.
+다음 5분. 가져올 것 세 가지를 정합니다. 구조 · 서술 · 비주얼 중에서 고르세요.
+마지막 4분. 이게 오늘의 핵심입니다. 안 가져올 것 하나와 그 이유.
+좋아 보이는데 나한테는 안 맞는 것. 이걸 안 적으면 벤치마킹이 그대로 모방으로 흐릅니다. 시간이 모자라도 이 단계는 하고 가셔야 해요.
+[운영 메모]
 마지막 4분이 이 실습의 핵심이다. 시간이 없어도 이 단계는 반드시 시킬 것.</a:t>
             </a:r>
             <a:endParaRPr lang="en-US" dirty="0"/>
@@ -961,7 +994,14 @@
           <a:p>
             <a:r>
               <a:rPr lang="en-US" dirty="0"/>
-              <a:t>[운영 메모]
+              <a:t>[말할 내용]
+제출 체크리스트입니다. 4주차 수업 전까지 올려 주세요.
+여덟 개인데 세 번째를 보세요. 프로젝트 개수 · 장수 · 순서 기준을 숫자로 적었는가. 숫자가 없으면 리포트가 아니라 감상문이 됩니다.
+그리고 일곱 번째와 여덟 번째.
+가져올 것이 레이아웃이 깔끔함 수준이면 다음 주에 쓸 수가 없습니다. 무엇을 어떻게 할지까지 적으세요. 프로젝트 첫 장에 문제 한 문장을 둔다, 이 정도로요.
+안 가져올 것 하나는 반드시 채워 오시고요. 이유까지요.
+양식은 오늘 안에 클래스룸에 올리겠습니다. 표로 되어 있어서 칸만 채우시면 됩니다.
+[운영 메모]
 리포트 양식을 클래스룸에 올려둘 것. 표로 만들어두면 학생들이 훨씬 구체적으로 쓴다.</a:t>
             </a:r>
             <a:endParaRPr lang="en-US" dirty="0"/>
@@ -1050,7 +1090,13 @@
           <a:p>
             <a:r>
               <a:rPr lang="en-US" dirty="0"/>
-              <a:t>[운영 메모]
+              <a:t>[말할 내용]
+정리하겠습니다.
+과제는 두 가지입니다. 벤치마킹 리포트, 그리고 가져올 것 세 가지와 안 가져올 것 한 가지.
+리포트는 오늘 조별로 채운 표를 그대로 옮기시면 됩니다. 사례 세 개를 네 구성 요소로 분해하고, 유형을 판정하고, 판정 이유를 한 줄씩. 양식은 오늘 안에 클래스룸에 올리겠습니다.
+두 번째가 다음 주 재료입니다. 가져올 것 세 개는 구조 · 서술 · 비주얼 중에서 고르시고, 안 가져올 것 하나는 이유까지 꼭 쓰세요.
+4주차 수업 전까지 올려 주시면 됩니다. 다음 주에는 이걸 들고 내 스토리라인을 짭니다. 리포트가 비어 있으면 다음 주에 앉아서 할 게 없어요.
+[운영 메모]
 '안 가져올 것'을 요구하는 것이 핵심이다. 벤치마킹이 모방으로 흐르는 것을 막는 장치이므로 반드시 채워 오게 할 것.</a:t>
             </a:r>
             <a:endParaRPr lang="en-US" dirty="0"/>
@@ -1139,7 +1185,15 @@
           <a:p>
             <a:r>
               <a:rPr lang="en-US" dirty="0"/>
-              <a:t>[운영 메모]
+              <a:t>[말할 내용]
+오늘 두 시간은 이렇게 씁니다.
+앞 10분은 과제 확인입니다. 스크랩 세 개 다 열려 있는지만 보겠습니다.
+그다음 30분이 강의입니다. 오늘 제가 말하는 시간은 여기까지예요. 분해하는 틀 하나, 이야기 유형 세 가지, 차별화 뽑는 순서. 이 세 개만 드립니다.
+그리고 45분이 조별 분석입니다. 소회의실로 나눠 보내고 제가 돌아가며 들어가겠습니다.
+휴식 10분 하고요.
+다시 모여서 20분은 개인 정리입니다. 조에서 본 걸 내 것으로 옮기는 시간이에요. 마지막 5분에 조별 발견을 채팅으로 모으고 과제 안내하겠습니다.
+오늘은 듣는 시간보다 쓰는 시간이 깁니다. 손 놓고 계시면 남는 게 없어요.
+[운영 메모]
 조는 목표 직무가 비슷한 사람끼리 묶는 것이 좋다. 2주차에 확정한 직무를 기준으로 미리 조를 짜 두면 토론이 훨씬 잘 굴러간다.</a:t>
             </a:r>
             <a:endParaRPr lang="en-US" dirty="0"/>
@@ -1228,7 +1282,14 @@
           <a:p>
             <a:r>
               <a:rPr lang="en-US" dirty="0"/>
-              <a:t>[운영 메모]
+              <a:t>[말할 내용]
+오늘 끝나면 네 가지를 가져가시게 됩니다.
+첫째, 포트폴리오를 네 덩어리로 분해할 수 있게 됩니다. 표지 · 소개 · 프로젝트 · 마무리. 이 틀로 보면 아무리 화려한 것도 뜯어집니다.
+둘째, 이야기를 끌고 가는 방식을 세 유형으로 구분하게 됩니다.
+셋째 — 오늘의 진짜 목표입니다. 사례에서 가져올 것과 가져오면 안 되는 것을 가를 수 있게 됩니다.
+넷째, 그 결과로 내 차별화 포인트를 한 줄로 말하게 됩니다.
+셋째를 한 번 더 보세요. 매년 이 주차에서 제일 많이 나오는 게, 좋아 보이는 걸 그대로 따라 만드는 겁니다. 그건 벤치마킹이 아니라 모방이고, 면접에서 바로 드러납니다.
+[운영 메모]
 3번이 오늘의 실질적 목표. 학생들은 좋아 보이는 것을 그대로 따라 하려 한다.</a:t>
             </a:r>
             <a:endParaRPr lang="en-US" dirty="0"/>
@@ -1317,7 +1378,12 @@
           <a:p>
             <a:r>
               <a:rPr lang="en-US" dirty="0"/>
-              <a:t>[운영 메모]
+              <a:t>[말할 내용]
+먼저 무엇을 보는지부터 맞추겠습니다.
+여러분이 가져온 걸 그냥 좋다 · 별로다로 보면 오늘 두 시간이 감상회가 됩니다.
+감상하지 말고 분해합니다. 같은 틀로 세 개를 뜯어보면 그때부터 패턴이 보입니다.
+제가 먼저 하나 띄워서 직접 뜯어 보이겠습니다. 이 순서 그대로 조별 실습에서 하시면 됩니다.
+[운영 메모]
 15분 구간. 강사가 사례 하나를 화면에 띄우고 직접 분해해 보이는 것이 가장 빠르다.</a:t>
             </a:r>
             <a:endParaRPr lang="en-US" dirty="0"/>
@@ -1406,7 +1472,13 @@
           <a:p>
             <a:r>
               <a:rPr lang="en-US" dirty="0"/>
-              <a:t>[운영 메모]
+              <a:t>[말할 내용]
+오늘 기억하실 문장입니다.
+벤치마킹은 베끼는 것이 아니라 구조를 읽는 것입니다.
+이 레이아웃 예쁘네, 에서 멈추면 남는 게 없어요. 스크린샷만 쌓입니다.
+물어야 할 건 두 개입니다. 왜 소개를 두 번째에 뒀지. 왜 이 프로젝트를 맨 앞에 뒀지.
+이 두 질문을 채팅창에 고정해 두겠습니다. 조별 분석 내내 이걸 붙들고 계세요. 답이 안 나오는 사례도 있습니다. 그것도 발견이에요.
+[운영 메모]
 학생들이 스크린샷만 모아오는 것을 막는 슬라이드. 질문 두 개를 판서해두고 조별 토론 내내 남겨둘 것.</a:t>
             </a:r>
             <a:endParaRPr lang="en-US" dirty="0"/>
@@ -1495,7 +1567,14 @@
           <a:p>
             <a:r>
               <a:rPr lang="en-US" dirty="0"/>
-              <a:t>[운영 메모]
+              <a:t>[말할 내용]
+어떤 포트폴리오든 이 네 덩어리로 나뉩니다.
+표지와 첫 화면. 이름 · 분야 · 한 줄 소개. 몇 초 안에 무엇을 하는 사람인지 전달되는가.
+소개. 길이가 얼마인가, 어디에 뒀는가를 보세요. 맨 앞에 둔 것과 프로젝트 뒤에 둔 것은 의도가 다릅니다.
+프로젝트. 몇 개인지, 순서 기준이 뭔지, 각각 몇 장인지. 여기는 반드시 숫자로 세십시오. 오늘 실습에서 제일 중요한 칸입니다.
+마무리와 연락처. 어떻게 끝나는가. 연락 수단과 이력서 링크가 있는가.
+아래 줄을 보세요. 프로젝트가 전체 분량의 70~80%입니다. 그런데 매년 학생들이 표지와 소개에 제일 오래 매달립니다. 거기는 짧고 정확하면 충분해요.
+[운영 메모]
 학생들이 1·2번에 과도하게 공을 들이다 정작 프로젝트가 부실해지는 경우가 많다.</a:t>
             </a:r>
             <a:endParaRPr lang="en-US" dirty="0"/>
@@ -1584,7 +1663,11 @@
           <a:p>
             <a:r>
               <a:rPr lang="en-US" dirty="0"/>
-              <a:t>[운영 메모]
+              <a:t>[말할 내용]
+두 번째입니다.
+구성 요소가 같아도 이야기를 끌고 가는 방식은 다릅니다. 세 유형으로 나눠 보겠습니다.
+이건 정답을 외우는 게 아니라, 여러분이 가져온 사례가 어느 쪽인지 판정해 보려고 쓰는 틀입니다.
+[운영 메모]
 15분 구간.</a:t>
             </a:r>
             <a:endParaRPr lang="en-US" dirty="0"/>
@@ -1673,7 +1756,14 @@
           <a:p>
             <a:r>
               <a:rPr lang="en-US" dirty="0"/>
-              <a:t>[운영 메모]
+              <a:t>[말할 내용]
+세 가지입니다.
+문제 해결형. 무엇이 문제였고 어떻게 풀었다. UX나 서비스 직무에 가장 잘 맞습니다. 대신 과정이 부실하면 제일 크게 무너져요. 문제만 거창하고 검증이 없으면 바로 보입니다.
+프로세스형. 어떻게 만들어 갔는가를 보여줍니다. 제품이나 공간 쪽에 맞고, 스케치 · 목업 · 도면이 그대로 자산이 됩니다. 다만 결론이 흐리면 그냥 나열로 읽힙니다.
+컨셉형. 나는 이렇게 본다, 가 먼저 옵니다. 그래픽이나 브랜딩 쪽이고요. 일관된 조형 언어가 있어야 성립합니다. 근거가 약하면 취향으로만 읽혀요.
+여러분 전공 특성상 대부분 프로세스형으로 가실 겁니다. 그게 자연스럽습니다.
+다만 2주차에 UX로 직무를 정하신 분. 같은 프로젝트를 문제 해결형으로 다시 쓰셔야 합니다. 프로젝트를 새로 하는 게 아니라 앞세우는 걸 바꾸는 겁니다.
+[운영 메모]
 실내·산업디자인 전공생 대부분이 프로세스형으로 간다. 다만 UX로 지원할 학생은 문제 해결형으로 다시 써야 한다는 점을 짚을 것.</a:t>
             </a:r>
             <a:endParaRPr lang="en-US" dirty="0"/>
@@ -1762,7 +1852,14 @@
           <a:p>
             <a:r>
               <a:rPr lang="en-US" dirty="0"/>
-              <a:t>[운영 메모]
+              <a:t>[말할 내용]
+같은 프로젝트 페이지를 두 방식으로 구성한 예입니다.
+첫 장을 보세요. 왼쪽은 문제 한 문장과 대표 이미지 하나. 오른쪽은 제목과 이미지 여섯 장.
+중간. 왼쪽은 고민한 지점과 고른 이유가 있고, 오른쪽은 작업 사진이 시간순으로 있습니다.
+맨 아래를 보세요. 왼쪽 다섯에서 일곱 장, 오른쪽 열두 장.
+여기서 반직관적인 이야기를 하나 하겠습니다. 장수가 적은 쪽이 더 잘 읽힙니다. 많이 넣으면 열심히 한 걸로 보일 것 같은데, 실제로는 역할 없는 페이지가 섞이면서 전체가 흐려집니다.
+기준은 하나예요. 각 장에 역할이 있는가. 없는 장은 빼는 게 이득입니다.
+[운영 메모]
 장수가 적은 쪽이 더 잘 읽힌다는 점이 학생들에게는 반직관적이다. 실제 사례로 보여줄 것.</a:t>
             </a:r>
             <a:endParaRPr lang="en-US" dirty="0"/>
@@ -2704,7 +2801,7 @@
                 <a:ea typeface="Pretendard" pitchFamily="34" charset="-122"/>
                 <a:cs typeface="Pretendard" pitchFamily="34" charset="-120"/>
               </a:rPr>
-              <a:t>120분 — 사전 과제 리뷰 15분 · 그룹 분석 50분 · 정리 30분 · 공유 15분</a:t>
+              <a:t>120분 — 과제 확인 10분 · 강의 30분 · 조별 분석 45분 · 개인 정리 20분 · 공유 5분</a:t>
             </a:r>
             <a:endParaRPr lang="en-US" sz="1200" dirty="0"/>
           </a:p>
@@ -4583,7 +4680,7 @@
                 <a:ea typeface="Pretendard" pitchFamily="34" charset="-122"/>
                 <a:cs typeface="Pretendard" pitchFamily="34" charset="-120"/>
               </a:rPr>
-              <a:t>50분 · 조별 — 각자 가져온 사례를 조원과 함께 뜯습니다.</a:t>
+              <a:t>45분 · 조별 — 각자 가져온 사례를 조원과 함께 뜯습니다.</a:t>
             </a:r>
             <a:endParaRPr lang="en-US" sz="1150" dirty="0"/>
           </a:p>
@@ -4647,7 +4744,7 @@
                 <a:ea typeface="Pretendard Light" pitchFamily="34" charset="-122"/>
                 <a:cs typeface="Pretendard Light" pitchFamily="34" charset="-120"/>
               </a:rPr>
-              <a:t>10분</a:t>
+              <a:t>8분</a:t>
             </a:r>
             <a:endParaRPr lang="en-US" sz="2200" dirty="0"/>
           </a:p>
@@ -4792,7 +4889,7 @@
                 <a:ea typeface="Pretendard Light" pitchFamily="34" charset="-122"/>
                 <a:cs typeface="Pretendard Light" pitchFamily="34" charset="-120"/>
               </a:rPr>
-              <a:t>20분</a:t>
+              <a:t>17분</a:t>
             </a:r>
             <a:endParaRPr lang="en-US" sz="2200" dirty="0"/>
           </a:p>
@@ -5557,7 +5654,7 @@
                 <a:ea typeface="Pretendard" pitchFamily="34" charset="-122"/>
                 <a:cs typeface="Pretendard" pitchFamily="34" charset="-120"/>
               </a:rPr>
-              <a:t>30분 · 개인 — 조별 분석을 내 것으로 옮깁니다.</a:t>
+              <a:t>20분 · 개인 — 조별 분석을 내 것으로 옮깁니다.</a:t>
             </a:r>
             <a:endParaRPr lang="en-US" sz="1150" dirty="0"/>
           </a:p>
@@ -5621,7 +5718,7 @@
                 <a:ea typeface="Pretendard Light" pitchFamily="34" charset="-122"/>
                 <a:cs typeface="Pretendard Light" pitchFamily="34" charset="-120"/>
               </a:rPr>
-              <a:t>9분</a:t>
+              <a:t>6분</a:t>
             </a:r>
             <a:endParaRPr lang="en-US" sz="2200" dirty="0"/>
           </a:p>
@@ -5766,7 +5863,7 @@
                 <a:ea typeface="Pretendard Light" pitchFamily="34" charset="-122"/>
                 <a:cs typeface="Pretendard Light" pitchFamily="34" charset="-120"/>
               </a:rPr>
-              <a:t>8분</a:t>
+              <a:t>5분</a:t>
             </a:r>
             <a:endParaRPr lang="en-US" sz="2200" dirty="0"/>
           </a:p>
@@ -5911,7 +6008,7 @@
                 <a:ea typeface="Pretendard Light" pitchFamily="34" charset="-122"/>
                 <a:cs typeface="Pretendard Light" pitchFamily="34" charset="-120"/>
               </a:rPr>
-              <a:t>8분</a:t>
+              <a:t>5분</a:t>
             </a:r>
             <a:endParaRPr lang="en-US" sz="2200" dirty="0"/>
           </a:p>
@@ -6056,7 +6153,7 @@
                 <a:ea typeface="Pretendard Light" pitchFamily="34" charset="-122"/>
                 <a:cs typeface="Pretendard Light" pitchFamily="34" charset="-120"/>
               </a:rPr>
-              <a:t>5분</a:t>
+              <a:t>4분</a:t>
             </a:r>
             <a:endParaRPr lang="en-US" sz="2200" dirty="0"/>
           </a:p>
@@ -9205,7 +9302,7 @@
                 <a:ea typeface="Pretendard" pitchFamily="34" charset="-122"/>
                 <a:cs typeface="Pretendard" pitchFamily="34" charset="-120"/>
               </a:rPr>
-              <a:t>사전 과제 리뷰 15분 · 그룹 분석 50분 · 정리 30분 · 공유 15분</a:t>
+              <a:t>과제 확인 10분 · 강의 30분 · 조별 분석 45분 · 개인 정리 20분 · 공유 5분</a:t>
             </a:r>
             <a:endParaRPr lang="en-US" sz="1150" dirty="0"/>
           </a:p>
@@ -9245,7 +9342,7 @@
         <p:spPr>
           <a:xfrm>
             <a:off x="640080" y="1719072"/>
-            <a:ext cx="1600200" cy="830275"/>
+            <a:ext cx="1600200" cy="691896"/>
           </a:xfrm>
           <a:prstGeom prst="rect">
             <a:avLst/>
@@ -9269,7 +9366,7 @@
                 <a:ea typeface="Pretendard" pitchFamily="34" charset="-122"/>
                 <a:cs typeface="Pretendard" pitchFamily="34" charset="-120"/>
               </a:rPr>
-              <a:t>00:00–00:15</a:t>
+              <a:t>00:00–00:10</a:t>
             </a:r>
             <a:endParaRPr lang="en-US" sz="1050" dirty="0"/>
           </a:p>
@@ -9284,7 +9381,7 @@
         <p:spPr>
           <a:xfrm>
             <a:off x="2377440" y="1719072"/>
-            <a:ext cx="6888175" cy="830275"/>
+            <a:ext cx="6888175" cy="691896"/>
           </a:xfrm>
           <a:prstGeom prst="rect">
             <a:avLst/>
@@ -9308,7 +9405,7 @@
                 <a:ea typeface="Pretendard" pitchFamily="34" charset="-122"/>
                 <a:cs typeface="Pretendard" pitchFamily="34" charset="-120"/>
               </a:rPr>
-              <a:t>사전 과제 리뷰 — 플립러닝</a:t>
+              <a:t>사전 과제 확인 · 오늘 목표</a:t>
             </a:r>
             <a:endParaRPr lang="en-US" sz="1300" dirty="0"/>
           </a:p>
@@ -9323,7 +9420,7 @@
         <p:spPr>
           <a:xfrm>
             <a:off x="9265615" y="1719072"/>
-            <a:ext cx="2286000" cy="830275"/>
+            <a:ext cx="2286000" cy="691896"/>
           </a:xfrm>
           <a:prstGeom prst="rect">
             <a:avLst/>
@@ -9347,7 +9444,7 @@
                 <a:ea typeface="Pretendard" pitchFamily="34" charset="-122"/>
                 <a:cs typeface="Pretendard" pitchFamily="34" charset="-120"/>
               </a:rPr>
-              <a:t>조별 발표</a:t>
+              <a:t>확인</a:t>
             </a:r>
             <a:endParaRPr lang="en-US" sz="1050" dirty="0"/>
           </a:p>
@@ -9361,7 +9458,7 @@
         </p:nvSpPr>
         <p:spPr>
           <a:xfrm>
-            <a:off x="640080" y="2531059"/>
+            <a:off x="640080" y="2392680"/>
             <a:ext cx="10911535" cy="7315"/>
           </a:xfrm>
           <a:prstGeom prst="rect">
@@ -9386,8 +9483,8 @@
         </p:nvSpPr>
         <p:spPr>
           <a:xfrm>
-            <a:off x="640080" y="2549347"/>
-            <a:ext cx="1600200" cy="830275"/>
+            <a:off x="640080" y="2410968"/>
+            <a:ext cx="1600200" cy="691896"/>
           </a:xfrm>
           <a:prstGeom prst="rect">
             <a:avLst/>
@@ -9411,7 +9508,7 @@
                 <a:ea typeface="Pretendard" pitchFamily="34" charset="-122"/>
                 <a:cs typeface="Pretendard" pitchFamily="34" charset="-120"/>
               </a:rPr>
-              <a:t>00:15–01:05</a:t>
+              <a:t>00:10–00:40</a:t>
             </a:r>
             <a:endParaRPr lang="en-US" sz="1050" dirty="0"/>
           </a:p>
@@ -9425,8 +9522,8 @@
         </p:nvSpPr>
         <p:spPr>
           <a:xfrm>
-            <a:off x="2377440" y="2549347"/>
-            <a:ext cx="6888175" cy="830275"/>
+            <a:off x="2377440" y="2410968"/>
+            <a:ext cx="6888175" cy="691896"/>
           </a:xfrm>
           <a:prstGeom prst="rect">
             <a:avLst/>
@@ -9450,7 +9547,7 @@
                 <a:ea typeface="Pretendard" pitchFamily="34" charset="-122"/>
                 <a:cs typeface="Pretendard" pitchFamily="34" charset="-120"/>
               </a:rPr>
-              <a:t>실습 1 — 사례 그룹 분석</a:t>
+              <a:t>강의 — 분해 틀 · 전략 유형 · 차별화</a:t>
             </a:r>
             <a:endParaRPr lang="en-US" sz="1300" dirty="0"/>
           </a:p>
@@ -9464,8 +9561,8 @@
         </p:nvSpPr>
         <p:spPr>
           <a:xfrm>
-            <a:off x="9265615" y="2549347"/>
-            <a:ext cx="2286000" cy="830275"/>
+            <a:off x="9265615" y="2410968"/>
+            <a:ext cx="2286000" cy="691896"/>
           </a:xfrm>
           <a:prstGeom prst="rect">
             <a:avLst/>
@@ -9489,7 +9586,7 @@
                 <a:ea typeface="Pretendard" pitchFamily="34" charset="-122"/>
                 <a:cs typeface="Pretendard" pitchFamily="34" charset="-120"/>
               </a:rPr>
-              <a:t>조별 워크</a:t>
+              <a:t>강의</a:t>
             </a:r>
             <a:endParaRPr lang="en-US" sz="1050" dirty="0"/>
           </a:p>
@@ -9503,7 +9600,7 @@
         </p:nvSpPr>
         <p:spPr>
           <a:xfrm>
-            <a:off x="640080" y="3361334"/>
+            <a:off x="640080" y="3084576"/>
             <a:ext cx="10911535" cy="7315"/>
           </a:xfrm>
           <a:prstGeom prst="rect">
@@ -9528,8 +9625,150 @@
         </p:nvSpPr>
         <p:spPr>
           <a:xfrm>
-            <a:off x="640080" y="3379622"/>
-            <a:ext cx="1600200" cy="830275"/>
+            <a:off x="640080" y="3102864"/>
+            <a:ext cx="1600200" cy="691896"/>
+          </a:xfrm>
+          <a:prstGeom prst="rect">
+            <a:avLst/>
+          </a:prstGeom>
+          <a:noFill/>
+          <a:ln/>
+        </p:spPr>
+        <p:txBody>
+          <a:bodyPr wrap="square" lIns="0" tIns="0" rIns="0" bIns="0" rtlCol="0" anchor="ctr"/>
+          <a:lstStyle/>
+          <a:p>
+            <a:pPr indent="0" marL="0">
+              <a:buNone/>
+            </a:pPr>
+            <a:r>
+              <a:rPr lang="en-US" sz="1050" b="1" spc="60" kern="0" dirty="0">
+                <a:solidFill>
+                  <a:srgbClr val="111111"/>
+                </a:solidFill>
+                <a:latin typeface="Pretendard" pitchFamily="34" charset="0"/>
+                <a:ea typeface="Pretendard" pitchFamily="34" charset="-122"/>
+                <a:cs typeface="Pretendard" pitchFamily="34" charset="-120"/>
+              </a:rPr>
+              <a:t>00:40–01:25</a:t>
+            </a:r>
+            <a:endParaRPr lang="en-US" sz="1050" dirty="0"/>
+          </a:p>
+        </p:txBody>
+      </p:sp>
+      <p:sp>
+        <p:nvSpPr>
+          <p:cNvPr id="19" name="Text 17"/>
+          <p:cNvSpPr/>
+          <p:nvPr/>
+        </p:nvSpPr>
+        <p:spPr>
+          <a:xfrm>
+            <a:off x="2377440" y="3102864"/>
+            <a:ext cx="6888175" cy="691896"/>
+          </a:xfrm>
+          <a:prstGeom prst="rect">
+            <a:avLst/>
+          </a:prstGeom>
+          <a:noFill/>
+          <a:ln/>
+        </p:spPr>
+        <p:txBody>
+          <a:bodyPr wrap="square" lIns="0" tIns="0" rIns="0" bIns="0" rtlCol="0" anchor="ctr"/>
+          <a:lstStyle/>
+          <a:p>
+            <a:pPr indent="0" marL="0">
+              <a:buNone/>
+            </a:pPr>
+            <a:r>
+              <a:rPr lang="en-US" sz="1300" b="1" dirty="0">
+                <a:solidFill>
+                  <a:srgbClr val="111111"/>
+                </a:solidFill>
+                <a:latin typeface="Pretendard" pitchFamily="34" charset="0"/>
+                <a:ea typeface="Pretendard" pitchFamily="34" charset="-122"/>
+                <a:cs typeface="Pretendard" pitchFamily="34" charset="-120"/>
+              </a:rPr>
+              <a:t>실습 1 — 사례 그룹 분석</a:t>
+            </a:r>
+            <a:endParaRPr lang="en-US" sz="1300" dirty="0"/>
+          </a:p>
+        </p:txBody>
+      </p:sp>
+      <p:sp>
+        <p:nvSpPr>
+          <p:cNvPr id="20" name="Text 18"/>
+          <p:cNvSpPr/>
+          <p:nvPr/>
+        </p:nvSpPr>
+        <p:spPr>
+          <a:xfrm>
+            <a:off x="9265615" y="3102864"/>
+            <a:ext cx="2286000" cy="691896"/>
+          </a:xfrm>
+          <a:prstGeom prst="rect">
+            <a:avLst/>
+          </a:prstGeom>
+          <a:noFill/>
+          <a:ln/>
+        </p:spPr>
+        <p:txBody>
+          <a:bodyPr wrap="square" lIns="0" tIns="0" rIns="0" bIns="0" rtlCol="0" anchor="ctr"/>
+          <a:lstStyle/>
+          <a:p>
+            <a:pPr algn="r" indent="0" marL="0">
+              <a:buNone/>
+            </a:pPr>
+            <a:r>
+              <a:rPr lang="en-US" sz="1050" dirty="0">
+                <a:solidFill>
+                  <a:srgbClr val="6E6E6E"/>
+                </a:solidFill>
+                <a:latin typeface="Pretendard" pitchFamily="34" charset="0"/>
+                <a:ea typeface="Pretendard" pitchFamily="34" charset="-122"/>
+                <a:cs typeface="Pretendard" pitchFamily="34" charset="-120"/>
+              </a:rPr>
+              <a:t>소회의실 · 조별</a:t>
+            </a:r>
+            <a:endParaRPr lang="en-US" sz="1050" dirty="0"/>
+          </a:p>
+        </p:txBody>
+      </p:sp>
+      <p:sp>
+        <p:nvSpPr>
+          <p:cNvPr id="21" name="Shape 19"/>
+          <p:cNvSpPr/>
+          <p:nvPr/>
+        </p:nvSpPr>
+        <p:spPr>
+          <a:xfrm>
+            <a:off x="640080" y="3776472"/>
+            <a:ext cx="10911535" cy="7315"/>
+          </a:xfrm>
+          <a:prstGeom prst="rect">
+            <a:avLst/>
+          </a:prstGeom>
+          <a:solidFill>
+            <a:srgbClr val="DCDCDC"/>
+          </a:solidFill>
+          <a:ln w="12700">
+            <a:solidFill>
+              <a:srgbClr val="DCDCDC"/>
+            </a:solidFill>
+            <a:prstDash val="solid"/>
+          </a:ln>
+        </p:spPr>
+      </p:sp>
+      <p:sp>
+        <p:nvSpPr>
+          <p:cNvPr id="22" name="Text 20"/>
+          <p:cNvSpPr/>
+          <p:nvPr/>
+        </p:nvSpPr>
+        <p:spPr>
+          <a:xfrm>
+            <a:off x="640080" y="3794760"/>
+            <a:ext cx="1600200" cy="691896"/>
           </a:xfrm>
           <a:prstGeom prst="rect">
             <a:avLst/>
@@ -9553,7 +9792,7 @@
                 <a:ea typeface="Pretendard" pitchFamily="34" charset="-122"/>
                 <a:cs typeface="Pretendard" pitchFamily="34" charset="-120"/>
               </a:rPr>
-              <a:t>01:05–01:15</a:t>
+              <a:t>01:25–01:35</a:t>
             </a:r>
             <a:endParaRPr lang="en-US" sz="1050" dirty="0"/>
           </a:p>
@@ -9561,14 +9800,14 @@
       </p:sp>
       <p:sp>
         <p:nvSpPr>
-          <p:cNvPr id="19" name="Text 17"/>
-          <p:cNvSpPr/>
-          <p:nvPr/>
-        </p:nvSpPr>
-        <p:spPr>
-          <a:xfrm>
-            <a:off x="2377440" y="3379622"/>
-            <a:ext cx="6888175" cy="830275"/>
+          <p:cNvPr id="23" name="Text 21"/>
+          <p:cNvSpPr/>
+          <p:nvPr/>
+        </p:nvSpPr>
+        <p:spPr>
+          <a:xfrm>
+            <a:off x="2377440" y="3794760"/>
+            <a:ext cx="6888175" cy="691896"/>
           </a:xfrm>
           <a:prstGeom prst="rect">
             <a:avLst/>
@@ -9600,13 +9839,13 @@
       </p:sp>
       <p:sp>
         <p:nvSpPr>
-          <p:cNvPr id="20" name="Shape 18"/>
-          <p:cNvSpPr/>
-          <p:nvPr/>
-        </p:nvSpPr>
-        <p:spPr>
-          <a:xfrm>
-            <a:off x="640080" y="4191610"/>
+          <p:cNvPr id="24" name="Shape 22"/>
+          <p:cNvSpPr/>
+          <p:nvPr/>
+        </p:nvSpPr>
+        <p:spPr>
+          <a:xfrm>
+            <a:off x="640080" y="4468368"/>
             <a:ext cx="10911535" cy="7315"/>
           </a:xfrm>
           <a:prstGeom prst="rect">
@@ -9625,14 +9864,14 @@
       </p:sp>
       <p:sp>
         <p:nvSpPr>
-          <p:cNvPr id="21" name="Text 19"/>
-          <p:cNvSpPr/>
-          <p:nvPr/>
-        </p:nvSpPr>
-        <p:spPr>
-          <a:xfrm>
-            <a:off x="640080" y="4209898"/>
-            <a:ext cx="1600200" cy="830275"/>
+          <p:cNvPr id="25" name="Text 23"/>
+          <p:cNvSpPr/>
+          <p:nvPr/>
+        </p:nvSpPr>
+        <p:spPr>
+          <a:xfrm>
+            <a:off x="640080" y="4486656"/>
+            <a:ext cx="1600200" cy="691896"/>
           </a:xfrm>
           <a:prstGeom prst="rect">
             <a:avLst/>
@@ -9656,7 +9895,7 @@
                 <a:ea typeface="Pretendard" pitchFamily="34" charset="-122"/>
                 <a:cs typeface="Pretendard" pitchFamily="34" charset="-120"/>
               </a:rPr>
-              <a:t>01:15–01:45</a:t>
+              <a:t>01:35–01:55</a:t>
             </a:r>
             <a:endParaRPr lang="en-US" sz="1050" dirty="0"/>
           </a:p>
@@ -9664,14 +9903,14 @@
       </p:sp>
       <p:sp>
         <p:nvSpPr>
-          <p:cNvPr id="22" name="Text 20"/>
-          <p:cNvSpPr/>
-          <p:nvPr/>
-        </p:nvSpPr>
-        <p:spPr>
-          <a:xfrm>
-            <a:off x="2377440" y="4209898"/>
-            <a:ext cx="6888175" cy="830275"/>
+          <p:cNvPr id="26" name="Text 24"/>
+          <p:cNvSpPr/>
+          <p:nvPr/>
+        </p:nvSpPr>
+        <p:spPr>
+          <a:xfrm>
+            <a:off x="2377440" y="4486656"/>
+            <a:ext cx="6888175" cy="691896"/>
           </a:xfrm>
           <a:prstGeom prst="rect">
             <a:avLst/>
@@ -9703,14 +9942,14 @@
       </p:sp>
       <p:sp>
         <p:nvSpPr>
-          <p:cNvPr id="23" name="Text 21"/>
-          <p:cNvSpPr/>
-          <p:nvPr/>
-        </p:nvSpPr>
-        <p:spPr>
-          <a:xfrm>
-            <a:off x="9265615" y="4209898"/>
-            <a:ext cx="2286000" cy="830275"/>
+          <p:cNvPr id="27" name="Text 25"/>
+          <p:cNvSpPr/>
+          <p:nvPr/>
+        </p:nvSpPr>
+        <p:spPr>
+          <a:xfrm>
+            <a:off x="9265615" y="4486656"/>
+            <a:ext cx="2286000" cy="691896"/>
           </a:xfrm>
           <a:prstGeom prst="rect">
             <a:avLst/>
@@ -9742,13 +9981,13 @@
       </p:sp>
       <p:sp>
         <p:nvSpPr>
-          <p:cNvPr id="24" name="Shape 22"/>
-          <p:cNvSpPr/>
-          <p:nvPr/>
-        </p:nvSpPr>
-        <p:spPr>
-          <a:xfrm>
-            <a:off x="640080" y="5021885"/>
+          <p:cNvPr id="28" name="Shape 26"/>
+          <p:cNvSpPr/>
+          <p:nvPr/>
+        </p:nvSpPr>
+        <p:spPr>
+          <a:xfrm>
+            <a:off x="640080" y="5160264"/>
             <a:ext cx="10911535" cy="7315"/>
           </a:xfrm>
           <a:prstGeom prst="rect">
@@ -9767,14 +10006,14 @@
       </p:sp>
       <p:sp>
         <p:nvSpPr>
-          <p:cNvPr id="25" name="Text 23"/>
-          <p:cNvSpPr/>
-          <p:nvPr/>
-        </p:nvSpPr>
-        <p:spPr>
-          <a:xfrm>
-            <a:off x="640080" y="5040173"/>
-            <a:ext cx="1600200" cy="830275"/>
+          <p:cNvPr id="29" name="Text 27"/>
+          <p:cNvSpPr/>
+          <p:nvPr/>
+        </p:nvSpPr>
+        <p:spPr>
+          <a:xfrm>
+            <a:off x="640080" y="5178552"/>
+            <a:ext cx="1600200" cy="691896"/>
           </a:xfrm>
           <a:prstGeom prst="rect">
             <a:avLst/>
@@ -9798,7 +10037,7 @@
                 <a:ea typeface="Pretendard" pitchFamily="34" charset="-122"/>
                 <a:cs typeface="Pretendard" pitchFamily="34" charset="-120"/>
               </a:rPr>
-              <a:t>01:45–02:00</a:t>
+              <a:t>01:55–02:00</a:t>
             </a:r>
             <a:endParaRPr lang="en-US" sz="1050" dirty="0"/>
           </a:p>
@@ -9806,14 +10045,14 @@
       </p:sp>
       <p:sp>
         <p:nvSpPr>
-          <p:cNvPr id="26" name="Text 24"/>
-          <p:cNvSpPr/>
-          <p:nvPr/>
-        </p:nvSpPr>
-        <p:spPr>
-          <a:xfrm>
-            <a:off x="2377440" y="5040173"/>
-            <a:ext cx="6888175" cy="830275"/>
+          <p:cNvPr id="30" name="Text 28"/>
+          <p:cNvSpPr/>
+          <p:nvPr/>
+        </p:nvSpPr>
+        <p:spPr>
+          <a:xfrm>
+            <a:off x="2377440" y="5178552"/>
+            <a:ext cx="6888175" cy="691896"/>
           </a:xfrm>
           <a:prstGeom prst="rect">
             <a:avLst/>
@@ -9837,7 +10076,7 @@
                 <a:ea typeface="Pretendard" pitchFamily="34" charset="-122"/>
                 <a:cs typeface="Pretendard" pitchFamily="34" charset="-120"/>
               </a:rPr>
-              <a:t>조별 공유 · 과제 안내</a:t>
+              <a:t>조별 발견 공유 · 과제 안내</a:t>
             </a:r>
             <a:endParaRPr lang="en-US" sz="1300" dirty="0"/>
           </a:p>
@@ -9845,14 +10084,14 @@
       </p:sp>
       <p:sp>
         <p:nvSpPr>
-          <p:cNvPr id="27" name="Text 25"/>
-          <p:cNvSpPr/>
-          <p:nvPr/>
-        </p:nvSpPr>
-        <p:spPr>
-          <a:xfrm>
-            <a:off x="9265615" y="5040173"/>
-            <a:ext cx="2286000" cy="830275"/>
+          <p:cNvPr id="31" name="Text 29"/>
+          <p:cNvSpPr/>
+          <p:nvPr/>
+        </p:nvSpPr>
+        <p:spPr>
+          <a:xfrm>
+            <a:off x="9265615" y="5178552"/>
+            <a:ext cx="2286000" cy="691896"/>
           </a:xfrm>
           <a:prstGeom prst="rect">
             <a:avLst/>
@@ -9876,7 +10115,7 @@
                 <a:ea typeface="Pretendard" pitchFamily="34" charset="-122"/>
                 <a:cs typeface="Pretendard" pitchFamily="34" charset="-120"/>
               </a:rPr>
-              <a:t>조별 + 안내</a:t>
+              <a:t>전체 + 안내</a:t>
             </a:r>
             <a:endParaRPr lang="en-US" sz="1050" dirty="0"/>
           </a:p>
@@ -9884,7 +10123,7 @@
       </p:sp>
       <p:sp>
         <p:nvSpPr>
-          <p:cNvPr id="28" name="Shape 26"/>
+          <p:cNvPr id="32" name="Shape 30"/>
           <p:cNvSpPr/>
           <p:nvPr/>
         </p:nvSpPr>
@@ -9909,7 +10148,7 @@
       </p:sp>
       <p:sp>
         <p:nvSpPr>
-          <p:cNvPr id="29" name="Shape 27"/>
+          <p:cNvPr id="33" name="Shape 31"/>
           <p:cNvSpPr/>
           <p:nvPr/>
         </p:nvSpPr>
@@ -9934,7 +10173,7 @@
       </p:sp>
       <p:sp>
         <p:nvSpPr>
-          <p:cNvPr id="30" name="Text 28"/>
+          <p:cNvPr id="34" name="Text 32"/>
           <p:cNvSpPr/>
           <p:nvPr/>
         </p:nvSpPr>
@@ -9973,7 +10212,7 @@
       </p:sp>
       <p:sp>
         <p:nvSpPr>
-          <p:cNvPr id="31" name="Text 29"/>
+          <p:cNvPr id="35" name="Text 33"/>
           <p:cNvSpPr/>
           <p:nvPr/>
         </p:nvSpPr>

--- a/dist/weeks-포트폴리오제작/포트폴리오제작_03주차_벤치마킹.pptx
+++ b/dist/weeks-포트폴리오제작/포트폴리오제작_03주차_벤치마킹.pptx
@@ -2306,9 +2306,9 @@
                 <a:solidFill>
                   <a:srgbClr val="111111"/>
                 </a:solidFill>
-                <a:latin typeface="Pretendard Black" pitchFamily="34" charset="0"/>
-                <a:ea typeface="Pretendard Black" pitchFamily="34" charset="-122"/>
-                <a:cs typeface="Pretendard Black" pitchFamily="34" charset="-120"/>
+                <a:latin typeface="Pretendard SemiBold" pitchFamily="34" charset="0"/>
+                <a:ea typeface="Pretendard SemiBold" pitchFamily="34" charset="-122"/>
+                <a:cs typeface="Pretendard SemiBold" pitchFamily="34" charset="-120"/>
               </a:rPr>
               <a:t>03</a:t>
             </a:r>
@@ -2456,9 +2456,9 @@
                 <a:solidFill>
                   <a:srgbClr val="111111"/>
                 </a:solidFill>
-                <a:latin typeface="Pretendard Black" pitchFamily="34" charset="0"/>
-                <a:ea typeface="Pretendard Black" pitchFamily="34" charset="-122"/>
-                <a:cs typeface="Pretendard Black" pitchFamily="34" charset="-120"/>
+                <a:latin typeface="Pretendard SemiBold" pitchFamily="34" charset="0"/>
+                <a:ea typeface="Pretendard SemiBold" pitchFamily="34" charset="-122"/>
+                <a:cs typeface="Pretendard SemiBold" pitchFamily="34" charset="-120"/>
               </a:rPr>
               <a:t>잘 만든 포트폴리오 살펴보기</a:t>
             </a:r>
@@ -2976,9 +2976,9 @@
                 <a:solidFill>
                   <a:srgbClr val="1B1B1B"/>
                 </a:solidFill>
-                <a:latin typeface="Pretendard Black" pitchFamily="34" charset="0"/>
-                <a:ea typeface="Pretendard Black" pitchFamily="34" charset="-122"/>
-                <a:cs typeface="Pretendard Black" pitchFamily="34" charset="-120"/>
+                <a:latin typeface="Pretendard SemiBold" pitchFamily="34" charset="0"/>
+                <a:ea typeface="Pretendard SemiBold" pitchFamily="34" charset="-122"/>
+                <a:cs typeface="Pretendard SemiBold" pitchFamily="34" charset="-120"/>
               </a:rPr>
               <a:t>03</a:t>
             </a:r>
@@ -3123,9 +3123,9 @@
                 <a:solidFill>
                   <a:srgbClr val="FFFFFF"/>
                 </a:solidFill>
-                <a:latin typeface="Pretendard Black" pitchFamily="34" charset="0"/>
-                <a:ea typeface="Pretendard Black" pitchFamily="34" charset="-122"/>
-                <a:cs typeface="Pretendard Black" pitchFamily="34" charset="-120"/>
+                <a:latin typeface="Pretendard SemiBold" pitchFamily="34" charset="0"/>
+                <a:ea typeface="Pretendard SemiBold" pitchFamily="34" charset="-122"/>
+                <a:cs typeface="Pretendard SemiBold" pitchFamily="34" charset="-120"/>
               </a:rPr>
               <a:t>실습 · 그룹 분석과 정리</a:t>
             </a:r>
@@ -3481,9 +3481,9 @@
                 <a:solidFill>
                   <a:srgbClr val="111111"/>
                 </a:solidFill>
-                <a:latin typeface="Pretendard Black" pitchFamily="34" charset="0"/>
-                <a:ea typeface="Pretendard Black" pitchFamily="34" charset="-122"/>
-                <a:cs typeface="Pretendard Black" pitchFamily="34" charset="-120"/>
+                <a:latin typeface="Pretendard SemiBold" pitchFamily="34" charset="0"/>
+                <a:ea typeface="Pretendard SemiBold" pitchFamily="34" charset="-122"/>
+                <a:cs typeface="Pretendard SemiBold" pitchFamily="34" charset="-120"/>
               </a:rPr>
               <a:t>실습 1 · 조별 사례 분석</a:t>
             </a:r>
@@ -3584,9 +3584,9 @@
                 <a:solidFill>
                   <a:srgbClr val="111111"/>
                 </a:solidFill>
-                <a:latin typeface="Pretendard Black" pitchFamily="34" charset="0"/>
-                <a:ea typeface="Pretendard Black" pitchFamily="34" charset="-122"/>
-                <a:cs typeface="Pretendard Black" pitchFamily="34" charset="-120"/>
+                <a:latin typeface="Pretendard SemiBold" pitchFamily="34" charset="0"/>
+                <a:ea typeface="Pretendard SemiBold" pitchFamily="34" charset="-122"/>
+                <a:cs typeface="Pretendard SemiBold" pitchFamily="34" charset="-120"/>
               </a:rPr>
               <a:t>공유</a:t>
             </a:r>
@@ -3690,9 +3690,9 @@
                 <a:solidFill>
                   <a:srgbClr val="111111"/>
                 </a:solidFill>
-                <a:latin typeface="Pretendard Black" pitchFamily="34" charset="0"/>
-                <a:ea typeface="Pretendard Black" pitchFamily="34" charset="-122"/>
-                <a:cs typeface="Pretendard Black" pitchFamily="34" charset="-120"/>
+                <a:latin typeface="Pretendard SemiBold" pitchFamily="34" charset="0"/>
+                <a:ea typeface="Pretendard SemiBold" pitchFamily="34" charset="-122"/>
+                <a:cs typeface="Pretendard SemiBold" pitchFamily="34" charset="-120"/>
               </a:rPr>
               <a:t>분해</a:t>
             </a:r>
@@ -3796,9 +3796,9 @@
                 <a:solidFill>
                   <a:srgbClr val="111111"/>
                 </a:solidFill>
-                <a:latin typeface="Pretendard Black" pitchFamily="34" charset="0"/>
-                <a:ea typeface="Pretendard Black" pitchFamily="34" charset="-122"/>
-                <a:cs typeface="Pretendard Black" pitchFamily="34" charset="-120"/>
+                <a:latin typeface="Pretendard SemiBold" pitchFamily="34" charset="0"/>
+                <a:ea typeface="Pretendard SemiBold" pitchFamily="34" charset="-122"/>
+                <a:cs typeface="Pretendard SemiBold" pitchFamily="34" charset="-120"/>
               </a:rPr>
               <a:t>유형 정하기</a:t>
             </a:r>
@@ -3902,9 +3902,9 @@
                 <a:solidFill>
                   <a:srgbClr val="FFFFFF"/>
                 </a:solidFill>
-                <a:latin typeface="Pretendard Black" pitchFamily="34" charset="0"/>
-                <a:ea typeface="Pretendard Black" pitchFamily="34" charset="-122"/>
-                <a:cs typeface="Pretendard Black" pitchFamily="34" charset="-120"/>
+                <a:latin typeface="Pretendard SemiBold" pitchFamily="34" charset="0"/>
+                <a:ea typeface="Pretendard SemiBold" pitchFamily="34" charset="-122"/>
+                <a:cs typeface="Pretendard SemiBold" pitchFamily="34" charset="-120"/>
               </a:rPr>
               <a:t>정리</a:t>
             </a:r>
@@ -4299,9 +4299,9 @@
                 <a:solidFill>
                   <a:srgbClr val="111111"/>
                 </a:solidFill>
-                <a:latin typeface="Pretendard Black" pitchFamily="34" charset="0"/>
-                <a:ea typeface="Pretendard Black" pitchFamily="34" charset="-122"/>
-                <a:cs typeface="Pretendard Black" pitchFamily="34" charset="-120"/>
+                <a:latin typeface="Pretendard SemiBold" pitchFamily="34" charset="0"/>
+                <a:ea typeface="Pretendard SemiBold" pitchFamily="34" charset="-122"/>
+                <a:cs typeface="Pretendard SemiBold" pitchFamily="34" charset="-120"/>
               </a:rPr>
               <a:t>실습 2 · 사례에서 배운 점 정리</a:t>
             </a:r>
@@ -4402,9 +4402,9 @@
                 <a:solidFill>
                   <a:srgbClr val="111111"/>
                 </a:solidFill>
-                <a:latin typeface="Pretendard Black" pitchFamily="34" charset="0"/>
-                <a:ea typeface="Pretendard Black" pitchFamily="34" charset="-122"/>
-                <a:cs typeface="Pretendard Black" pitchFamily="34" charset="-120"/>
+                <a:latin typeface="Pretendard SemiBold" pitchFamily="34" charset="0"/>
+                <a:ea typeface="Pretendard SemiBold" pitchFamily="34" charset="-122"/>
+                <a:cs typeface="Pretendard SemiBold" pitchFamily="34" charset="-120"/>
               </a:rPr>
               <a:t>공통점 · 비어 있는 곳</a:t>
             </a:r>
@@ -4508,9 +4508,9 @@
                 <a:solidFill>
                   <a:srgbClr val="111111"/>
                 </a:solidFill>
-                <a:latin typeface="Pretendard Black" pitchFamily="34" charset="0"/>
-                <a:ea typeface="Pretendard Black" pitchFamily="34" charset="-122"/>
-                <a:cs typeface="Pretendard Black" pitchFamily="34" charset="-120"/>
+                <a:latin typeface="Pretendard SemiBold" pitchFamily="34" charset="0"/>
+                <a:ea typeface="Pretendard SemiBold" pitchFamily="34" charset="-122"/>
+                <a:cs typeface="Pretendard SemiBold" pitchFamily="34" charset="-120"/>
               </a:rPr>
               <a:t>내 강점과 맞춰보기</a:t>
             </a:r>
@@ -4614,9 +4614,9 @@
                 <a:solidFill>
                   <a:srgbClr val="111111"/>
                 </a:solidFill>
-                <a:latin typeface="Pretendard Black" pitchFamily="34" charset="0"/>
-                <a:ea typeface="Pretendard Black" pitchFamily="34" charset="-122"/>
-                <a:cs typeface="Pretendard Black" pitchFamily="34" charset="-120"/>
+                <a:latin typeface="Pretendard SemiBold" pitchFamily="34" charset="0"/>
+                <a:ea typeface="Pretendard SemiBold" pitchFamily="34" charset="-122"/>
+                <a:cs typeface="Pretendard SemiBold" pitchFamily="34" charset="-120"/>
               </a:rPr>
               <a:t>가져올 것 3가지</a:t>
             </a:r>
@@ -4720,9 +4720,9 @@
                 <a:solidFill>
                   <a:srgbClr val="FFFFFF"/>
                 </a:solidFill>
-                <a:latin typeface="Pretendard Black" pitchFamily="34" charset="0"/>
-                <a:ea typeface="Pretendard Black" pitchFamily="34" charset="-122"/>
-                <a:cs typeface="Pretendard Black" pitchFamily="34" charset="-120"/>
+                <a:latin typeface="Pretendard SemiBold" pitchFamily="34" charset="0"/>
+                <a:ea typeface="Pretendard SemiBold" pitchFamily="34" charset="-122"/>
+                <a:cs typeface="Pretendard SemiBold" pitchFamily="34" charset="-120"/>
               </a:rPr>
               <a:t>가져오지 않을 것 1가지</a:t>
             </a:r>
@@ -5117,9 +5117,9 @@
                 <a:solidFill>
                   <a:srgbClr val="111111"/>
                 </a:solidFill>
-                <a:latin typeface="Pretendard Black" pitchFamily="34" charset="0"/>
-                <a:ea typeface="Pretendard Black" pitchFamily="34" charset="-122"/>
-                <a:cs typeface="Pretendard Black" pitchFamily="34" charset="-120"/>
+                <a:latin typeface="Pretendard SemiBold" pitchFamily="34" charset="0"/>
+                <a:ea typeface="Pretendard SemiBold" pitchFamily="34" charset="-122"/>
+                <a:cs typeface="Pretendard SemiBold" pitchFamily="34" charset="-120"/>
               </a:rPr>
               <a:t>사례 분석 보고서 점검표</a:t>
             </a:r>
@@ -6599,9 +6599,9 @@
                 <a:solidFill>
                   <a:srgbClr val="111111"/>
                 </a:solidFill>
-                <a:latin typeface="Pretendard Black" pitchFamily="34" charset="0"/>
-                <a:ea typeface="Pretendard Black" pitchFamily="34" charset="-122"/>
-                <a:cs typeface="Pretendard Black" pitchFamily="34" charset="-120"/>
+                <a:latin typeface="Pretendard SemiBold" pitchFamily="34" charset="0"/>
+                <a:ea typeface="Pretendard SemiBold" pitchFamily="34" charset="-122"/>
+                <a:cs typeface="Pretendard SemiBold" pitchFamily="34" charset="-120"/>
               </a:rPr>
               <a:t>과제와 다음 주</a:t>
             </a:r>
@@ -6766,9 +6766,9 @@
                 <a:solidFill>
                   <a:srgbClr val="111111"/>
                 </a:solidFill>
-                <a:latin typeface="Pretendard Black" pitchFamily="34" charset="0"/>
-                <a:ea typeface="Pretendard Black" pitchFamily="34" charset="-122"/>
-                <a:cs typeface="Pretendard Black" pitchFamily="34" charset="-120"/>
+                <a:latin typeface="Pretendard SemiBold" pitchFamily="34" charset="0"/>
+                <a:ea typeface="Pretendard SemiBold" pitchFamily="34" charset="-122"/>
+                <a:cs typeface="Pretendard SemiBold" pitchFamily="34" charset="-120"/>
               </a:rPr>
               <a:t>사례 분석 보고서 제출</a:t>
             </a:r>
@@ -6936,9 +6936,9 @@
                 <a:solidFill>
                   <a:srgbClr val="111111"/>
                 </a:solidFill>
-                <a:latin typeface="Pretendard Black" pitchFamily="34" charset="0"/>
-                <a:ea typeface="Pretendard Black" pitchFamily="34" charset="-122"/>
-                <a:cs typeface="Pretendard Black" pitchFamily="34" charset="-120"/>
+                <a:latin typeface="Pretendard SemiBold" pitchFamily="34" charset="0"/>
+                <a:ea typeface="Pretendard SemiBold" pitchFamily="34" charset="-122"/>
+                <a:cs typeface="Pretendard SemiBold" pitchFamily="34" charset="-120"/>
               </a:rPr>
               <a:t>가져올 것 3가지 · 가져오지 않을 것 1가지</a:t>
             </a:r>
@@ -7187,9 +7187,9 @@
                 <a:solidFill>
                   <a:srgbClr val="FFFFFF"/>
                 </a:solidFill>
-                <a:latin typeface="Pretendard Black" pitchFamily="34" charset="0"/>
-                <a:ea typeface="Pretendard Black" pitchFamily="34" charset="-122"/>
-                <a:cs typeface="Pretendard Black" pitchFamily="34" charset="-120"/>
+                <a:latin typeface="Pretendard SemiBold" pitchFamily="34" charset="0"/>
+                <a:ea typeface="Pretendard SemiBold" pitchFamily="34" charset="-122"/>
+                <a:cs typeface="Pretendard SemiBold" pitchFamily="34" charset="-120"/>
               </a:rPr>
               <a:t>이야기 흐름 짜기 Ⅰ</a:t>
             </a:r>
@@ -7791,9 +7791,9 @@
                 <a:solidFill>
                   <a:srgbClr val="111111"/>
                 </a:solidFill>
-                <a:latin typeface="Pretendard Black" pitchFamily="34" charset="0"/>
-                <a:ea typeface="Pretendard Black" pitchFamily="34" charset="-122"/>
-                <a:cs typeface="Pretendard Black" pitchFamily="34" charset="-120"/>
+                <a:latin typeface="Pretendard SemiBold" pitchFamily="34" charset="0"/>
+                <a:ea typeface="Pretendard SemiBold" pitchFamily="34" charset="-122"/>
+                <a:cs typeface="Pretendard SemiBold" pitchFamily="34" charset="-120"/>
               </a:rPr>
               <a:t>오늘의 목표</a:t>
             </a:r>
@@ -7919,9 +7919,9 @@
                 <a:solidFill>
                   <a:srgbClr val="111111"/>
                 </a:solidFill>
-                <a:latin typeface="Pretendard Black" pitchFamily="34" charset="0"/>
-                <a:ea typeface="Pretendard Black" pitchFamily="34" charset="-122"/>
-                <a:cs typeface="Pretendard Black" pitchFamily="34" charset="-120"/>
+                <a:latin typeface="Pretendard SemiBold" pitchFamily="34" charset="0"/>
+                <a:ea typeface="Pretendard SemiBold" pitchFamily="34" charset="-122"/>
+                <a:cs typeface="Pretendard SemiBold" pitchFamily="34" charset="-120"/>
               </a:rPr>
               <a:t>포트폴리오를 네 가지 항목으로 구분해서 본다.</a:t>
             </a:r>
@@ -8086,9 +8086,9 @@
                 <a:solidFill>
                   <a:srgbClr val="111111"/>
                 </a:solidFill>
-                <a:latin typeface="Pretendard Black" pitchFamily="34" charset="0"/>
-                <a:ea typeface="Pretendard Black" pitchFamily="34" charset="-122"/>
-                <a:cs typeface="Pretendard Black" pitchFamily="34" charset="-120"/>
+                <a:latin typeface="Pretendard SemiBold" pitchFamily="34" charset="0"/>
+                <a:ea typeface="Pretendard SemiBold" pitchFamily="34" charset="-122"/>
+                <a:cs typeface="Pretendard SemiBold" pitchFamily="34" charset="-120"/>
               </a:rPr>
               <a:t>이야기를 풀어가는 방식을 유형별로 구분한다.</a:t>
             </a:r>
@@ -8253,9 +8253,9 @@
                 <a:solidFill>
                   <a:srgbClr val="111111"/>
                 </a:solidFill>
-                <a:latin typeface="Pretendard Black" pitchFamily="34" charset="0"/>
-                <a:ea typeface="Pretendard Black" pitchFamily="34" charset="-122"/>
-                <a:cs typeface="Pretendard Black" pitchFamily="34" charset="-120"/>
+                <a:latin typeface="Pretendard SemiBold" pitchFamily="34" charset="0"/>
+                <a:ea typeface="Pretendard SemiBold" pitchFamily="34" charset="-122"/>
+                <a:cs typeface="Pretendard SemiBold" pitchFamily="34" charset="-120"/>
               </a:rPr>
               <a:t>사례에서 배울 점과 하지 말아야 할 내용을 확인 할 수 있다.</a:t>
             </a:r>
@@ -8420,9 +8420,9 @@
                 <a:solidFill>
                   <a:srgbClr val="111111"/>
                 </a:solidFill>
-                <a:latin typeface="Pretendard Black" pitchFamily="34" charset="0"/>
-                <a:ea typeface="Pretendard Black" pitchFamily="34" charset="-122"/>
-                <a:cs typeface="Pretendard Black" pitchFamily="34" charset="-120"/>
+                <a:latin typeface="Pretendard SemiBold" pitchFamily="34" charset="0"/>
+                <a:ea typeface="Pretendard SemiBold" pitchFamily="34" charset="-122"/>
+                <a:cs typeface="Pretendard SemiBold" pitchFamily="34" charset="-120"/>
               </a:rPr>
               <a:t>내 포트폴리오만의 강점을 말할 수 있다</a:t>
             </a:r>
@@ -8775,9 +8775,9 @@
                 <a:solidFill>
                   <a:srgbClr val="1B1B1B"/>
                 </a:solidFill>
-                <a:latin typeface="Pretendard Black" pitchFamily="34" charset="0"/>
-                <a:ea typeface="Pretendard Black" pitchFamily="34" charset="-122"/>
-                <a:cs typeface="Pretendard Black" pitchFamily="34" charset="-120"/>
+                <a:latin typeface="Pretendard SemiBold" pitchFamily="34" charset="0"/>
+                <a:ea typeface="Pretendard SemiBold" pitchFamily="34" charset="-122"/>
+                <a:cs typeface="Pretendard SemiBold" pitchFamily="34" charset="-120"/>
               </a:rPr>
               <a:t>01</a:t>
             </a:r>
@@ -8922,9 +8922,9 @@
                 <a:solidFill>
                   <a:srgbClr val="FFFFFF"/>
                 </a:solidFill>
-                <a:latin typeface="Pretendard Black" pitchFamily="34" charset="0"/>
-                <a:ea typeface="Pretendard Black" pitchFamily="34" charset="-122"/>
-                <a:cs typeface="Pretendard Black" pitchFamily="34" charset="-120"/>
+                <a:latin typeface="Pretendard SemiBold" pitchFamily="34" charset="0"/>
+                <a:ea typeface="Pretendard SemiBold" pitchFamily="34" charset="-122"/>
+                <a:cs typeface="Pretendard SemiBold" pitchFamily="34" charset="-120"/>
               </a:rPr>
               <a:t>기준을 가지고 분석하자.</a:t>
             </a:r>
@@ -9308,9 +9308,9 @@
                 <a:solidFill>
                   <a:srgbClr val="FFFFFF"/>
                 </a:solidFill>
-                <a:latin typeface="Pretendard Black" pitchFamily="34" charset="0"/>
-                <a:ea typeface="Pretendard Black" pitchFamily="34" charset="-122"/>
-                <a:cs typeface="Pretendard Black" pitchFamily="34" charset="-120"/>
+                <a:latin typeface="Pretendard SemiBold" pitchFamily="34" charset="0"/>
+                <a:ea typeface="Pretendard SemiBold" pitchFamily="34" charset="-122"/>
+                <a:cs typeface="Pretendard SemiBold" pitchFamily="34" charset="-120"/>
               </a:rPr>
               <a:t>참고한다는 것은 카피하는 것이 아니라</a:t>
             </a:r>
@@ -9328,9 +9328,9 @@
                 <a:solidFill>
                   <a:srgbClr val="FFFFFF"/>
                 </a:solidFill>
-                <a:latin typeface="Pretendard Black" pitchFamily="34" charset="0"/>
-                <a:ea typeface="Pretendard Black" pitchFamily="34" charset="-122"/>
-                <a:cs typeface="Pretendard Black" pitchFamily="34" charset="-120"/>
+                <a:latin typeface="Pretendard SemiBold" pitchFamily="34" charset="0"/>
+                <a:ea typeface="Pretendard SemiBold" pitchFamily="34" charset="-122"/>
+                <a:cs typeface="Pretendard SemiBold" pitchFamily="34" charset="-120"/>
               </a:rPr>
               <a:t>구조를 읽는 것.</a:t>
             </a:r>
@@ -9661,9 +9661,9 @@
                 <a:solidFill>
                   <a:srgbClr val="111111"/>
                 </a:solidFill>
-                <a:latin typeface="Pretendard Black" pitchFamily="34" charset="0"/>
-                <a:ea typeface="Pretendard Black" pitchFamily="34" charset="-122"/>
-                <a:cs typeface="Pretendard Black" pitchFamily="34" charset="-120"/>
+                <a:latin typeface="Pretendard SemiBold" pitchFamily="34" charset="0"/>
+                <a:ea typeface="Pretendard SemiBold" pitchFamily="34" charset="-122"/>
+                <a:cs typeface="Pretendard SemiBold" pitchFamily="34" charset="-120"/>
               </a:rPr>
               <a:t>포트폴리오 구성 요소 네 가지</a:t>
             </a:r>
@@ -9828,9 +9828,9 @@
                 <a:solidFill>
                   <a:srgbClr val="111111"/>
                 </a:solidFill>
-                <a:latin typeface="Pretendard Black" pitchFamily="34" charset="0"/>
-                <a:ea typeface="Pretendard Black" pitchFamily="34" charset="-122"/>
-                <a:cs typeface="Pretendard Black" pitchFamily="34" charset="-120"/>
+                <a:latin typeface="Pretendard SemiBold" pitchFamily="34" charset="0"/>
+                <a:ea typeface="Pretendard SemiBold" pitchFamily="34" charset="-122"/>
+                <a:cs typeface="Pretendard SemiBold" pitchFamily="34" charset="-120"/>
               </a:rPr>
               <a:t>표지 · 첫 화면</a:t>
             </a:r>
@@ -10034,9 +10034,9 @@
                 <a:solidFill>
                   <a:srgbClr val="111111"/>
                 </a:solidFill>
-                <a:latin typeface="Pretendard Black" pitchFamily="34" charset="0"/>
-                <a:ea typeface="Pretendard Black" pitchFamily="34" charset="-122"/>
-                <a:cs typeface="Pretendard Black" pitchFamily="34" charset="-120"/>
+                <a:latin typeface="Pretendard SemiBold" pitchFamily="34" charset="0"/>
+                <a:ea typeface="Pretendard SemiBold" pitchFamily="34" charset="-122"/>
+                <a:cs typeface="Pretendard SemiBold" pitchFamily="34" charset="-120"/>
               </a:rPr>
               <a:t>소개 · About</a:t>
             </a:r>
@@ -10240,9 +10240,9 @@
                 <a:solidFill>
                   <a:srgbClr val="111111"/>
                 </a:solidFill>
-                <a:latin typeface="Pretendard Black" pitchFamily="34" charset="0"/>
-                <a:ea typeface="Pretendard Black" pitchFamily="34" charset="-122"/>
-                <a:cs typeface="Pretendard Black" pitchFamily="34" charset="-120"/>
+                <a:latin typeface="Pretendard SemiBold" pitchFamily="34" charset="0"/>
+                <a:ea typeface="Pretendard SemiBold" pitchFamily="34" charset="-122"/>
+                <a:cs typeface="Pretendard SemiBold" pitchFamily="34" charset="-120"/>
               </a:rPr>
               <a:t>프로젝트</a:t>
             </a:r>
@@ -10446,9 +10446,9 @@
                 <a:solidFill>
                   <a:srgbClr val="111111"/>
                 </a:solidFill>
-                <a:latin typeface="Pretendard Black" pitchFamily="34" charset="0"/>
-                <a:ea typeface="Pretendard Black" pitchFamily="34" charset="-122"/>
-                <a:cs typeface="Pretendard Black" pitchFamily="34" charset="-120"/>
+                <a:latin typeface="Pretendard SemiBold" pitchFamily="34" charset="0"/>
+                <a:ea typeface="Pretendard SemiBold" pitchFamily="34" charset="-122"/>
+                <a:cs typeface="Pretendard SemiBold" pitchFamily="34" charset="-120"/>
               </a:rPr>
               <a:t>마무리 · 연락처</a:t>
             </a:r>
@@ -10907,9 +10907,9 @@
                 <a:solidFill>
                   <a:srgbClr val="1B1B1B"/>
                 </a:solidFill>
-                <a:latin typeface="Pretendard Black" pitchFamily="34" charset="0"/>
-                <a:ea typeface="Pretendard Black" pitchFamily="34" charset="-122"/>
-                <a:cs typeface="Pretendard Black" pitchFamily="34" charset="-120"/>
+                <a:latin typeface="Pretendard SemiBold" pitchFamily="34" charset="0"/>
+                <a:ea typeface="Pretendard SemiBold" pitchFamily="34" charset="-122"/>
+                <a:cs typeface="Pretendard SemiBold" pitchFamily="34" charset="-120"/>
               </a:rPr>
               <a:t>02</a:t>
             </a:r>
@@ -11054,9 +11054,9 @@
                 <a:solidFill>
                   <a:srgbClr val="FFFFFF"/>
                 </a:solidFill>
-                <a:latin typeface="Pretendard Black" pitchFamily="34" charset="0"/>
-                <a:ea typeface="Pretendard Black" pitchFamily="34" charset="-122"/>
-                <a:cs typeface="Pretendard Black" pitchFamily="34" charset="-120"/>
+                <a:latin typeface="Pretendard SemiBold" pitchFamily="34" charset="0"/>
+                <a:ea typeface="Pretendard SemiBold" pitchFamily="34" charset="-122"/>
+                <a:cs typeface="Pretendard SemiBold" pitchFamily="34" charset="-120"/>
               </a:rPr>
               <a:t>어떤 방식으로 구성할 것인가?</a:t>
             </a:r>
@@ -11412,9 +11412,9 @@
                 <a:solidFill>
                   <a:srgbClr val="111111"/>
                 </a:solidFill>
-                <a:latin typeface="Pretendard Black" pitchFamily="34" charset="0"/>
-                <a:ea typeface="Pretendard Black" pitchFamily="34" charset="-122"/>
-                <a:cs typeface="Pretendard Black" pitchFamily="34" charset="-120"/>
+                <a:latin typeface="Pretendard SemiBold" pitchFamily="34" charset="0"/>
+                <a:ea typeface="Pretendard SemiBold" pitchFamily="34" charset="-122"/>
+                <a:cs typeface="Pretendard SemiBold" pitchFamily="34" charset="-120"/>
               </a:rPr>
               <a:t>이야기를 풀어가는 세 가지 방식</a:t>
             </a:r>
@@ -11515,9 +11515,9 @@
                 <a:solidFill>
                   <a:srgbClr val="FFFFFF"/>
                 </a:solidFill>
-                <a:latin typeface="Pretendard Black" pitchFamily="34" charset="0"/>
-                <a:ea typeface="Pretendard Black" pitchFamily="34" charset="-122"/>
-                <a:cs typeface="Pretendard Black" pitchFamily="34" charset="-120"/>
+                <a:latin typeface="Pretendard SemiBold" pitchFamily="34" charset="0"/>
+                <a:ea typeface="Pretendard SemiBold" pitchFamily="34" charset="-122"/>
+                <a:cs typeface="Pretendard SemiBold" pitchFamily="34" charset="-120"/>
               </a:rPr>
               <a:t>문제 해결형</a:t>
             </a:r>
@@ -11764,9 +11764,9 @@
                 <a:solidFill>
                   <a:srgbClr val="111111"/>
                 </a:solidFill>
-                <a:latin typeface="Pretendard Black" pitchFamily="34" charset="0"/>
-                <a:ea typeface="Pretendard Black" pitchFamily="34" charset="-122"/>
-                <a:cs typeface="Pretendard Black" pitchFamily="34" charset="-120"/>
+                <a:latin typeface="Pretendard SemiBold" pitchFamily="34" charset="0"/>
+                <a:ea typeface="Pretendard SemiBold" pitchFamily="34" charset="-122"/>
+                <a:cs typeface="Pretendard SemiBold" pitchFamily="34" charset="-120"/>
               </a:rPr>
               <a:t>프로세스형</a:t>
             </a:r>
@@ -12013,9 +12013,9 @@
                 <a:solidFill>
                   <a:srgbClr val="111111"/>
                 </a:solidFill>
-                <a:latin typeface="Pretendard Black" pitchFamily="34" charset="0"/>
-                <a:ea typeface="Pretendard Black" pitchFamily="34" charset="-122"/>
-                <a:cs typeface="Pretendard Black" pitchFamily="34" charset="-120"/>
+                <a:latin typeface="Pretendard SemiBold" pitchFamily="34" charset="0"/>
+                <a:ea typeface="Pretendard SemiBold" pitchFamily="34" charset="-122"/>
+                <a:cs typeface="Pretendard SemiBold" pitchFamily="34" charset="-120"/>
               </a:rPr>
               <a:t>컨셉형</a:t>
             </a:r>
@@ -12620,9 +12620,9 @@
                 <a:solidFill>
                   <a:srgbClr val="111111"/>
                 </a:solidFill>
-                <a:latin typeface="Pretendard Black" pitchFamily="34" charset="0"/>
-                <a:ea typeface="Pretendard Black" pitchFamily="34" charset="-122"/>
-                <a:cs typeface="Pretendard Black" pitchFamily="34" charset="-120"/>
+                <a:latin typeface="Pretendard SemiBold" pitchFamily="34" charset="0"/>
+                <a:ea typeface="Pretendard SemiBold" pitchFamily="34" charset="-122"/>
+                <a:cs typeface="Pretendard SemiBold" pitchFamily="34" charset="-120"/>
               </a:rPr>
               <a:t>이야기가 있는 구성과 그냥 나열</a:t>
             </a:r>
@@ -12723,9 +12723,9 @@
                 <a:solidFill>
                   <a:srgbClr val="111111"/>
                 </a:solidFill>
-                <a:latin typeface="Pretendard Black" pitchFamily="34" charset="0"/>
-                <a:ea typeface="Pretendard Black" pitchFamily="34" charset="-122"/>
-                <a:cs typeface="Pretendard Black" pitchFamily="34" charset="-120"/>
+                <a:latin typeface="Pretendard SemiBold" pitchFamily="34" charset="0"/>
+                <a:ea typeface="Pretendard SemiBold" pitchFamily="34" charset="-122"/>
+                <a:cs typeface="Pretendard SemiBold" pitchFamily="34" charset="-120"/>
               </a:rPr>
               <a:t>이야기가 있는 구성</a:t>
             </a:r>
@@ -12787,9 +12787,9 @@
                 <a:solidFill>
                   <a:srgbClr val="9B9B9B"/>
                 </a:solidFill>
-                <a:latin typeface="Pretendard Black" pitchFamily="34" charset="0"/>
-                <a:ea typeface="Pretendard Black" pitchFamily="34" charset="-122"/>
-                <a:cs typeface="Pretendard Black" pitchFamily="34" charset="-120"/>
+                <a:latin typeface="Pretendard SemiBold" pitchFamily="34" charset="0"/>
+                <a:ea typeface="Pretendard SemiBold" pitchFamily="34" charset="-122"/>
+                <a:cs typeface="Pretendard SemiBold" pitchFamily="34" charset="-120"/>
               </a:rPr>
               <a:t>나열</a:t>
             </a:r>
@@ -13940,9 +13940,9 @@
                 <a:solidFill>
                   <a:srgbClr val="111111"/>
                 </a:solidFill>
-                <a:latin typeface="Pretendard Black" pitchFamily="34" charset="0"/>
-                <a:ea typeface="Pretendard Black" pitchFamily="34" charset="-122"/>
-                <a:cs typeface="Pretendard Black" pitchFamily="34" charset="-120"/>
+                <a:latin typeface="Pretendard SemiBold" pitchFamily="34" charset="0"/>
+                <a:ea typeface="Pretendard SemiBold" pitchFamily="34" charset="-122"/>
+                <a:cs typeface="Pretendard SemiBold" pitchFamily="34" charset="-120"/>
               </a:rPr>
               <a:t>나만의 강점 찾기</a:t>
             </a:r>
@@ -14110,9 +14110,9 @@
                 <a:solidFill>
                   <a:srgbClr val="111111"/>
                 </a:solidFill>
-                <a:latin typeface="Pretendard Black" pitchFamily="34" charset="0"/>
-                <a:ea typeface="Pretendard Black" pitchFamily="34" charset="-122"/>
-                <a:cs typeface="Pretendard Black" pitchFamily="34" charset="-120"/>
+                <a:latin typeface="Pretendard SemiBold" pitchFamily="34" charset="0"/>
+                <a:ea typeface="Pretendard SemiBold" pitchFamily="34" charset="-122"/>
+                <a:cs typeface="Pretendard SemiBold" pitchFamily="34" charset="-120"/>
               </a:rPr>
               <a:t>공통점을 먼저 찾는다</a:t>
             </a:r>
@@ -14283,9 +14283,9 @@
                 <a:solidFill>
                   <a:srgbClr val="111111"/>
                 </a:solidFill>
-                <a:latin typeface="Pretendard Black" pitchFamily="34" charset="0"/>
-                <a:ea typeface="Pretendard Black" pitchFamily="34" charset="-122"/>
-                <a:cs typeface="Pretendard Black" pitchFamily="34" charset="-120"/>
+                <a:latin typeface="Pretendard SemiBold" pitchFamily="34" charset="0"/>
+                <a:ea typeface="Pretendard SemiBold" pitchFamily="34" charset="-122"/>
+                <a:cs typeface="Pretendard SemiBold" pitchFamily="34" charset="-120"/>
               </a:rPr>
               <a:t>비어 있는 곳을 찾는다</a:t>
             </a:r>
@@ -14456,9 +14456,9 @@
                 <a:solidFill>
                   <a:srgbClr val="111111"/>
                 </a:solidFill>
-                <a:latin typeface="Pretendard Black" pitchFamily="34" charset="0"/>
-                <a:ea typeface="Pretendard Black" pitchFamily="34" charset="-122"/>
-                <a:cs typeface="Pretendard Black" pitchFamily="34" charset="-120"/>
+                <a:latin typeface="Pretendard SemiBold" pitchFamily="34" charset="0"/>
+                <a:ea typeface="Pretendard SemiBold" pitchFamily="34" charset="-122"/>
+                <a:cs typeface="Pretendard SemiBold" pitchFamily="34" charset="-120"/>
               </a:rPr>
               <a:t>내 강점과 겹치는지 본다</a:t>
             </a:r>

--- a/dist/weeks-포트폴리오제작/포트폴리오제작_03주차_벤치마킹.pptx
+++ b/dist/weeks-포트폴리오제작/포트폴리오제작_03주차_벤치마킹.pptx
@@ -11098,6 +11098,95 @@
             <a:avLst/>
           </a:prstGeom>
           <a:solidFill>
+            <a:srgbClr val="FFFFFF"/>
+          </a:solidFill>
+          <a:ln w="12700">
+            <a:solidFill>
+              <a:srgbClr val="111111"/>
+            </a:solidFill>
+            <a:prstDash val="solid"/>
+          </a:ln>
+        </p:spPr>
+      </p:sp>
+      <p:sp>
+        <p:nvSpPr>
+          <p:cNvPr id="10" name="Shape 8"/>
+          <p:cNvSpPr/>
+          <p:nvPr/>
+        </p:nvSpPr>
+        <p:spPr>
+          <a:xfrm>
+            <a:off x="640080" y="1627632"/>
+            <a:ext cx="5254600" cy="64008"/>
+          </a:xfrm>
+          <a:prstGeom prst="rect">
+            <a:avLst/>
+          </a:prstGeom>
+          <a:solidFill>
+            <a:srgbClr val="111111"/>
+          </a:solidFill>
+          <a:ln w="12700">
+            <a:solidFill>
+              <a:srgbClr val="111111"/>
+            </a:solidFill>
+            <a:prstDash val="solid"/>
+          </a:ln>
+        </p:spPr>
+      </p:sp>
+      <p:sp>
+        <p:nvSpPr>
+          <p:cNvPr id="11" name="Text 9"/>
+          <p:cNvSpPr/>
+          <p:nvPr/>
+        </p:nvSpPr>
+        <p:spPr>
+          <a:xfrm>
+            <a:off x="1042416" y="1901952"/>
+            <a:ext cx="4449928" cy="365760"/>
+          </a:xfrm>
+          <a:prstGeom prst="rect">
+            <a:avLst/>
+          </a:prstGeom>
+          <a:noFill/>
+          <a:ln/>
+        </p:spPr>
+        <p:txBody>
+          <a:bodyPr wrap="square" lIns="0" tIns="0" rIns="0" bIns="0" rtlCol="0" anchor="ctr"/>
+          <a:lstStyle/>
+          <a:p>
+            <a:pPr indent="0" marL="0">
+              <a:buNone/>
+            </a:pPr>
+            <a:r>
+              <a:rPr lang="en-US" sz="1700" dirty="0">
+                <a:solidFill>
+                  <a:srgbClr val="111111"/>
+                </a:solidFill>
+                <a:latin typeface="Pretendard SemiBold" pitchFamily="34" charset="0"/>
+                <a:ea typeface="Pretendard SemiBold" pitchFamily="34" charset="-122"/>
+                <a:cs typeface="Pretendard SemiBold" pitchFamily="34" charset="-120"/>
+              </a:rPr>
+              <a:t>이야기가 있는 구성</a:t>
+            </a:r>
+            <a:endParaRPr lang="en-US" sz="1700" dirty="0"/>
+          </a:p>
+        </p:txBody>
+      </p:sp>
+      <p:sp>
+        <p:nvSpPr>
+          <p:cNvPr id="12" name="Shape 10"/>
+          <p:cNvSpPr/>
+          <p:nvPr/>
+        </p:nvSpPr>
+        <p:spPr>
+          <a:xfrm>
+            <a:off x="6297016" y="1627632"/>
+            <a:ext cx="5254600" cy="3419856"/>
+          </a:xfrm>
+          <a:prstGeom prst="rect">
+            <a:avLst/>
+          </a:prstGeom>
+          <a:solidFill>
             <a:srgbClr val="F2F2F2"/>
           </a:solidFill>
           <a:ln w="12700">
@@ -11110,13 +11199,13 @@
       </p:sp>
       <p:sp>
         <p:nvSpPr>
-          <p:cNvPr id="10" name="Text 8"/>
-          <p:cNvSpPr/>
-          <p:nvPr/>
-        </p:nvSpPr>
-        <p:spPr>
-          <a:xfrm>
-            <a:off x="1042416" y="1901952"/>
+          <p:cNvPr id="13" name="Text 11"/>
+          <p:cNvSpPr/>
+          <p:nvPr/>
+        </p:nvSpPr>
+        <p:spPr>
+          <a:xfrm>
+            <a:off x="6699352" y="1901952"/>
             <a:ext cx="4449928" cy="365760"/>
           </a:xfrm>
           <a:prstGeom prst="rect">
@@ -11135,13 +11224,13 @@
             <a:r>
               <a:rPr lang="en-US" sz="1700" dirty="0">
                 <a:solidFill>
-                  <a:srgbClr val="111111"/>
+                  <a:srgbClr val="9B9B9B"/>
                 </a:solidFill>
                 <a:latin typeface="Pretendard SemiBold" pitchFamily="34" charset="0"/>
                 <a:ea typeface="Pretendard SemiBold" pitchFamily="34" charset="-122"/>
                 <a:cs typeface="Pretendard SemiBold" pitchFamily="34" charset="-120"/>
               </a:rPr>
-              <a:t>이야기가 있는 구성</a:t>
+              <a:t>나열</a:t>
             </a:r>
             <a:endParaRPr lang="en-US" sz="1700" dirty="0"/>
           </a:p>
@@ -11149,71 +11238,7 @@
       </p:sp>
       <p:sp>
         <p:nvSpPr>
-          <p:cNvPr id="11" name="Shape 9"/>
-          <p:cNvSpPr/>
-          <p:nvPr/>
-        </p:nvSpPr>
-        <p:spPr>
-          <a:xfrm>
-            <a:off x="6297016" y="1627632"/>
-            <a:ext cx="5254600" cy="3419856"/>
-          </a:xfrm>
-          <a:prstGeom prst="rect">
-            <a:avLst/>
-          </a:prstGeom>
-          <a:solidFill>
-            <a:srgbClr val="FFFFFF"/>
-          </a:solidFill>
-          <a:ln w="12700">
-            <a:solidFill>
-              <a:srgbClr val="DCDCDC"/>
-            </a:solidFill>
-            <a:prstDash val="solid"/>
-          </a:ln>
-        </p:spPr>
-      </p:sp>
-      <p:sp>
-        <p:nvSpPr>
-          <p:cNvPr id="12" name="Text 10"/>
-          <p:cNvSpPr/>
-          <p:nvPr/>
-        </p:nvSpPr>
-        <p:spPr>
-          <a:xfrm>
-            <a:off x="6699352" y="1901952"/>
-            <a:ext cx="4449928" cy="365760"/>
-          </a:xfrm>
-          <a:prstGeom prst="rect">
-            <a:avLst/>
-          </a:prstGeom>
-          <a:noFill/>
-          <a:ln/>
-        </p:spPr>
-        <p:txBody>
-          <a:bodyPr wrap="square" lIns="0" tIns="0" rIns="0" bIns="0" rtlCol="0" anchor="ctr"/>
-          <a:lstStyle/>
-          <a:p>
-            <a:pPr indent="0" marL="0">
-              <a:buNone/>
-            </a:pPr>
-            <a:r>
-              <a:rPr lang="en-US" sz="1700" dirty="0">
-                <a:solidFill>
-                  <a:srgbClr val="9B9B9B"/>
-                </a:solidFill>
-                <a:latin typeface="Pretendard SemiBold" pitchFamily="34" charset="0"/>
-                <a:ea typeface="Pretendard SemiBold" pitchFamily="34" charset="-122"/>
-                <a:cs typeface="Pretendard SemiBold" pitchFamily="34" charset="-120"/>
-              </a:rPr>
-              <a:t>나열</a:t>
-            </a:r>
-            <a:endParaRPr lang="en-US" sz="1700" dirty="0"/>
-          </a:p>
-        </p:txBody>
-      </p:sp>
-      <p:sp>
-        <p:nvSpPr>
-          <p:cNvPr id="13" name="Text 11"/>
+          <p:cNvPr id="14" name="Text 12"/>
           <p:cNvSpPr/>
           <p:nvPr/>
         </p:nvSpPr>
@@ -11252,7 +11277,7 @@
       </p:sp>
       <p:sp>
         <p:nvSpPr>
-          <p:cNvPr id="14" name="Text 12"/>
+          <p:cNvPr id="15" name="Text 13"/>
           <p:cNvSpPr/>
           <p:nvPr/>
         </p:nvSpPr>
@@ -11278,7 +11303,7 @@
               <a:buNone/>
             </a:pPr>
             <a:r>
-              <a:rPr lang="en-US" sz="1150" dirty="0">
+              <a:rPr lang="en-US" sz="1150" b="1" dirty="0">
                 <a:solidFill>
                   <a:srgbClr val="1F1F1F"/>
                 </a:solidFill>
@@ -11294,7 +11319,7 @@
       </p:sp>
       <p:sp>
         <p:nvSpPr>
-          <p:cNvPr id="15" name="Text 13"/>
+          <p:cNvPr id="16" name="Text 14"/>
           <p:cNvSpPr/>
           <p:nvPr/>
         </p:nvSpPr>
@@ -11333,7 +11358,7 @@
       </p:sp>
       <p:sp>
         <p:nvSpPr>
-          <p:cNvPr id="16" name="Text 14"/>
+          <p:cNvPr id="17" name="Text 15"/>
           <p:cNvSpPr/>
           <p:nvPr/>
         </p:nvSpPr>
@@ -11375,7 +11400,7 @@
       </p:sp>
       <p:sp>
         <p:nvSpPr>
-          <p:cNvPr id="17" name="Shape 15"/>
+          <p:cNvPr id="18" name="Shape 16"/>
           <p:cNvSpPr/>
           <p:nvPr/>
         </p:nvSpPr>
@@ -11400,7 +11425,7 @@
       </p:sp>
       <p:sp>
         <p:nvSpPr>
-          <p:cNvPr id="18" name="Shape 16"/>
+          <p:cNvPr id="19" name="Shape 17"/>
           <p:cNvSpPr/>
           <p:nvPr/>
         </p:nvSpPr>
@@ -11425,7 +11450,7 @@
       </p:sp>
       <p:sp>
         <p:nvSpPr>
-          <p:cNvPr id="19" name="Text 17"/>
+          <p:cNvPr id="20" name="Text 18"/>
           <p:cNvSpPr/>
           <p:nvPr/>
         </p:nvSpPr>
@@ -11464,7 +11489,7 @@
       </p:sp>
       <p:sp>
         <p:nvSpPr>
-          <p:cNvPr id="20" name="Text 18"/>
+          <p:cNvPr id="21" name="Text 19"/>
           <p:cNvSpPr/>
           <p:nvPr/>
         </p:nvSpPr>
@@ -11490,7 +11515,7 @@
               <a:buNone/>
             </a:pPr>
             <a:r>
-              <a:rPr lang="en-US" sz="1150" dirty="0">
+              <a:rPr lang="en-US" sz="1150" b="1" dirty="0">
                 <a:solidFill>
                   <a:srgbClr val="1F1F1F"/>
                 </a:solidFill>
@@ -11506,7 +11531,7 @@
       </p:sp>
       <p:sp>
         <p:nvSpPr>
-          <p:cNvPr id="21" name="Text 19"/>
+          <p:cNvPr id="22" name="Text 20"/>
           <p:cNvSpPr/>
           <p:nvPr/>
         </p:nvSpPr>
@@ -11545,7 +11570,7 @@
       </p:sp>
       <p:sp>
         <p:nvSpPr>
-          <p:cNvPr id="22" name="Text 20"/>
+          <p:cNvPr id="23" name="Text 21"/>
           <p:cNvSpPr/>
           <p:nvPr/>
         </p:nvSpPr>
@@ -11587,7 +11612,7 @@
       </p:sp>
       <p:sp>
         <p:nvSpPr>
-          <p:cNvPr id="23" name="Shape 21"/>
+          <p:cNvPr id="24" name="Shape 22"/>
           <p:cNvSpPr/>
           <p:nvPr/>
         </p:nvSpPr>
@@ -11612,7 +11637,7 @@
       </p:sp>
       <p:sp>
         <p:nvSpPr>
-          <p:cNvPr id="24" name="Shape 22"/>
+          <p:cNvPr id="25" name="Shape 23"/>
           <p:cNvSpPr/>
           <p:nvPr/>
         </p:nvSpPr>
@@ -11637,7 +11662,7 @@
       </p:sp>
       <p:sp>
         <p:nvSpPr>
-          <p:cNvPr id="25" name="Text 23"/>
+          <p:cNvPr id="26" name="Text 24"/>
           <p:cNvSpPr/>
           <p:nvPr/>
         </p:nvSpPr>
@@ -11676,7 +11701,7 @@
       </p:sp>
       <p:sp>
         <p:nvSpPr>
-          <p:cNvPr id="26" name="Text 24"/>
+          <p:cNvPr id="27" name="Text 25"/>
           <p:cNvSpPr/>
           <p:nvPr/>
         </p:nvSpPr>
@@ -11702,7 +11727,7 @@
               <a:buNone/>
             </a:pPr>
             <a:r>
-              <a:rPr lang="en-US" sz="1150" dirty="0">
+              <a:rPr lang="en-US" sz="1150" b="1" dirty="0">
                 <a:solidFill>
                   <a:srgbClr val="1F1F1F"/>
                 </a:solidFill>
@@ -11718,7 +11743,7 @@
       </p:sp>
       <p:sp>
         <p:nvSpPr>
-          <p:cNvPr id="27" name="Text 25"/>
+          <p:cNvPr id="28" name="Text 26"/>
           <p:cNvSpPr/>
           <p:nvPr/>
         </p:nvSpPr>
@@ -11757,7 +11782,7 @@
       </p:sp>
       <p:sp>
         <p:nvSpPr>
-          <p:cNvPr id="28" name="Text 26"/>
+          <p:cNvPr id="29" name="Text 27"/>
           <p:cNvSpPr/>
           <p:nvPr/>
         </p:nvSpPr>
@@ -11799,7 +11824,7 @@
       </p:sp>
       <p:sp>
         <p:nvSpPr>
-          <p:cNvPr id="29" name="Shape 27"/>
+          <p:cNvPr id="30" name="Shape 28"/>
           <p:cNvSpPr/>
           <p:nvPr/>
         </p:nvSpPr>
@@ -11824,7 +11849,7 @@
       </p:sp>
       <p:sp>
         <p:nvSpPr>
-          <p:cNvPr id="30" name="Shape 28"/>
+          <p:cNvPr id="31" name="Shape 29"/>
           <p:cNvSpPr/>
           <p:nvPr/>
         </p:nvSpPr>
@@ -11849,7 +11874,7 @@
       </p:sp>
       <p:sp>
         <p:nvSpPr>
-          <p:cNvPr id="31" name="Text 29"/>
+          <p:cNvPr id="32" name="Text 30"/>
           <p:cNvSpPr/>
           <p:nvPr/>
         </p:nvSpPr>
@@ -11888,7 +11913,7 @@
       </p:sp>
       <p:sp>
         <p:nvSpPr>
-          <p:cNvPr id="32" name="Text 30"/>
+          <p:cNvPr id="33" name="Text 31"/>
           <p:cNvSpPr/>
           <p:nvPr/>
         </p:nvSpPr>
@@ -11914,7 +11939,7 @@
               <a:buNone/>
             </a:pPr>
             <a:r>
-              <a:rPr lang="en-US" sz="1150" dirty="0">
+              <a:rPr lang="en-US" sz="1150" b="1" dirty="0">
                 <a:solidFill>
                   <a:srgbClr val="1F1F1F"/>
                 </a:solidFill>
@@ -11930,7 +11955,7 @@
       </p:sp>
       <p:sp>
         <p:nvSpPr>
-          <p:cNvPr id="33" name="Text 31"/>
+          <p:cNvPr id="34" name="Text 32"/>
           <p:cNvSpPr/>
           <p:nvPr/>
         </p:nvSpPr>
@@ -11969,7 +11994,7 @@
       </p:sp>
       <p:sp>
         <p:nvSpPr>
-          <p:cNvPr id="34" name="Text 32"/>
+          <p:cNvPr id="35" name="Text 33"/>
           <p:cNvSpPr/>
           <p:nvPr/>
         </p:nvSpPr>
@@ -12011,7 +12036,7 @@
       </p:sp>
       <p:sp>
         <p:nvSpPr>
-          <p:cNvPr id="35" name="Shape 33"/>
+          <p:cNvPr id="36" name="Shape 34"/>
           <p:cNvSpPr/>
           <p:nvPr/>
         </p:nvSpPr>
@@ -12036,7 +12061,7 @@
       </p:sp>
       <p:sp>
         <p:nvSpPr>
-          <p:cNvPr id="36" name="Text 34"/>
+          <p:cNvPr id="37" name="Text 35"/>
           <p:cNvSpPr/>
           <p:nvPr/>
         </p:nvSpPr>
@@ -12075,7 +12100,7 @@
       </p:sp>
       <p:sp>
         <p:nvSpPr>
-          <p:cNvPr id="37" name="Text 35"/>
+          <p:cNvPr id="38" name="Text 36"/>
           <p:cNvSpPr/>
           <p:nvPr/>
         </p:nvSpPr>
